--- a/dist/초1/국어/대화와문학/초1_국어_대화와문학_01_바르게듣고차례지켜말하기_학생용.pptx
+++ b/dist/초1/국어/대화와문학/초1_국어_대화와문학_01_바르게듣고차례지켜말하기_학생용.pptx
@@ -118,19 +118,19 @@
   <p:extLst>
     <p:ext uri="{521415D9-36F7-43E2-AB2F-B90AF26B5E84}">
       <p14:sectionLst xmlns:p14="http://schemas.microsoft.com/office/powerpoint/2010/main">
-        <p14:section name="도입" id="{62ee03fa-8b73-8802-9ea5-80249832dfa1}">
+        <p14:section name="도입" id="{94572167-1385-21c6-cab7-2c61e66e2639}">
           <p14:sldIdLst>
             <p14:sldId id="256"/>
             <p14:sldId id="257"/>
           </p14:sldIdLst>
         </p14:section>
-        <p14:section name="개념" id="{53275b2a-1f8e-24ff-a530-3ecd805e74e7}">
+        <p14:section name="개념" id="{f022716e-05c8-741b-1ff3-0d6acca79a43}">
           <p14:sldIdLst>
             <p14:sldId id="258"/>
             <p14:sldId id="259"/>
           </p14:sldIdLst>
         </p14:section>
-        <p14:section name="연습" id="{b3b391bb-e0b6-b41c-c82d-ab348ea7120f}">
+        <p14:section name="연습" id="{3ac03eb5-5590-6ec9-a760-00c964fead49}">
           <p14:sldIdLst>
             <p14:sldId id="260"/>
             <p14:sldId id="261"/>
@@ -138,18 +138,18 @@
             <p14:sldId id="263"/>
           </p14:sldIdLst>
         </p14:section>
-        <p14:section name="확인" id="{e6ebcd9c-fec0-0b14-196d-f251aae060c3}">
+        <p14:section name="확인" id="{978e2d7a-5f01-da6e-6f24-9509acde73c8}">
           <p14:sldIdLst>
             <p14:sldId id="264"/>
             <p14:sldId id="265"/>
           </p14:sldIdLst>
         </p14:section>
-        <p14:section name="정리" id="{ca4b51b8-326e-76fc-3100-3059c947d856}">
+        <p14:section name="정리" id="{407fa9ae-3203-b06c-abec-55c70f7e008f}">
           <p14:sldIdLst>
             <p14:sldId id="266"/>
           </p14:sldIdLst>
         </p14:section>
-        <p14:section name="보충" id="{38da1b34-b3be-a92a-5ed6-5f769d2a0773}">
+        <p14:section name="보충" id="{ec7c9102-265d-5030-e98d-18d98a3684c3}">
           <p14:sldIdLst>
             <p14:sldId id="267"/>
           </p14:sldIdLst>

--- a/dist/초1/국어/대화와문학/초1_국어_대화와문학_01_바르게듣고차례지켜말하기_학생용.pptx
+++ b/dist/초1/국어/대화와문학/초1_국어_대화와문학_01_바르게듣고차례지켜말하기_학생용.pptx
@@ -118,19 +118,19 @@
   <p:extLst>
     <p:ext uri="{521415D9-36F7-43E2-AB2F-B90AF26B5E84}">
       <p14:sectionLst xmlns:p14="http://schemas.microsoft.com/office/powerpoint/2010/main">
-        <p14:section name="도입" id="{94572167-1385-21c6-cab7-2c61e66e2639}">
+        <p14:section name="도입" id="{ac9d6a01-4996-fdad-f78d-228bd3f6d729}">
           <p14:sldIdLst>
             <p14:sldId id="256"/>
             <p14:sldId id="257"/>
           </p14:sldIdLst>
         </p14:section>
-        <p14:section name="개념" id="{f022716e-05c8-741b-1ff3-0d6acca79a43}">
+        <p14:section name="개념" id="{541e2086-3227-b2a8-9f88-1f49c729b6c6}">
           <p14:sldIdLst>
             <p14:sldId id="258"/>
             <p14:sldId id="259"/>
           </p14:sldIdLst>
         </p14:section>
-        <p14:section name="연습" id="{3ac03eb5-5590-6ec9-a760-00c964fead49}">
+        <p14:section name="연습" id="{2f6321f5-18e2-b7c5-b3da-c7f9ff54f7d3}">
           <p14:sldIdLst>
             <p14:sldId id="260"/>
             <p14:sldId id="261"/>
@@ -138,18 +138,18 @@
             <p14:sldId id="263"/>
           </p14:sldIdLst>
         </p14:section>
-        <p14:section name="확인" id="{978e2d7a-5f01-da6e-6f24-9509acde73c8}">
+        <p14:section name="확인" id="{69adc3cd-f950-b9fb-1326-2de18525e379}">
           <p14:sldIdLst>
             <p14:sldId id="264"/>
             <p14:sldId id="265"/>
           </p14:sldIdLst>
         </p14:section>
-        <p14:section name="정리" id="{407fa9ae-3203-b06c-abec-55c70f7e008f}">
+        <p14:section name="정리" id="{34e5e98a-388e-c545-21e9-fa15a743e5d9}">
           <p14:sldIdLst>
             <p14:sldId id="266"/>
           </p14:sldIdLst>
         </p14:section>
-        <p14:section name="보충" id="{ec7c9102-265d-5030-e98d-18d98a3684c3}">
+        <p14:section name="보충" id="{c90d1fa4-7acf-2be2-5c26-948fc71ed762}">
           <p14:sldIdLst>
             <p14:sldId id="267"/>
           </p14:sldIdLst>
@@ -2609,7 +2609,7 @@
               <a:buNone/>
             </a:pPr>
             <a:r>
-              <a:rPr lang="ko-KR" altLang="en-US" sz="5000" b="1" dirty="0">
+              <a:rPr lang="ko-KR" altLang="en-US" sz="4800" b="1" dirty="0">
                 <a:solidFill>
                   <a:srgbClr val="FFFFFF"/>
                 </a:solidFill>
